--- a/docs/presentation.pptx
+++ b/docs/presentation.pptx
@@ -4286,7 +4286,7 @@
         <p:spPr>
           <a:xfrm>
             <a:off x="548640" y="1600200"/>
-            <a:ext cx="5943600" cy="2743200"/>
+            <a:ext cx="5943600" cy="1783080"/>
           </a:xfrm>
           <a:prstGeom prst="rect">
             <a:avLst/>
@@ -4300,12 +4300,12 @@
           <a:p>
             <a:pPr indent="0" marL="0">
               <a:lnSpc>
-                <a:spcPct val="125000"/>
+                <a:spcPct val="120000"/>
               </a:lnSpc>
               <a:buNone/>
             </a:pPr>
             <a:r>
-              <a:rPr lang="en-US" sz="1500" b="1" dirty="0">
+              <a:rPr lang="en-US" sz="1400" b="1" dirty="0">
                 <a:solidFill>
                   <a:srgbClr val="1E2761"/>
                 </a:solidFill>
@@ -4317,12 +4317,12 @@
             </a:r>
             <a:pPr indent="0" marL="0">
               <a:lnSpc>
-                <a:spcPct val="125000"/>
+                <a:spcPct val="120000"/>
               </a:lnSpc>
               <a:buNone/>
             </a:pPr>
             <a:r>
-              <a:rPr lang="en-US" sz="1500" dirty="0">
+              <a:rPr lang="en-US" sz="1400" dirty="0">
                 <a:solidFill>
                   <a:srgbClr val="1A1A2E"/>
                 </a:solidFill>
@@ -4335,12 +4335,12 @@
             </a:r>
             <a:pPr indent="0" marL="0">
               <a:lnSpc>
-                <a:spcPct val="125000"/>
+                <a:spcPct val="120000"/>
               </a:lnSpc>
               <a:buNone/>
             </a:pPr>
             <a:r>
-              <a:rPr lang="en-US" sz="1500" b="1" dirty="0">
+              <a:rPr lang="en-US" sz="1400" b="1" dirty="0">
                 <a:solidFill>
                   <a:srgbClr val="1E2761"/>
                 </a:solidFill>
@@ -4352,12 +4352,12 @@
             </a:r>
             <a:pPr indent="0" marL="0">
               <a:lnSpc>
-                <a:spcPct val="125000"/>
+                <a:spcPct val="120000"/>
               </a:lnSpc>
               <a:buNone/>
             </a:pPr>
             <a:r>
-              <a:rPr lang="en-US" sz="1500" dirty="0">
+              <a:rPr lang="en-US" sz="1400" dirty="0">
                 <a:solidFill>
                   <a:srgbClr val="1A1A2E"/>
                 </a:solidFill>
@@ -4367,7 +4367,7 @@
               </a:rPr>
               <a:t>fuse a Vision Transformer (global features) with a CNN (local features), add a palmprint enhancement module, then reduce dimensionality for a compact, mobile-ready template.</a:t>
             </a:r>
-            <a:endParaRPr lang="en-US" sz="1500" dirty="0"/>
+            <a:endParaRPr lang="en-US" sz="1400" dirty="0"/>
           </a:p>
         </p:txBody>
       </p:sp>
@@ -4379,7 +4379,7 @@
         </p:nvSpPr>
         <p:spPr>
           <a:xfrm>
-            <a:off x="548640" y="3977640"/>
+            <a:off x="548640" y="4160520"/>
             <a:ext cx="1188720" cy="731520"/>
           </a:xfrm>
           <a:prstGeom prst="roundRect">
@@ -4401,7 +4401,7 @@
         </p:nvSpPr>
         <p:spPr>
           <a:xfrm>
-            <a:off x="548640" y="3977640"/>
+            <a:off x="548640" y="4160520"/>
             <a:ext cx="1188720" cy="731520"/>
           </a:xfrm>
           <a:prstGeom prst="rect">
@@ -4457,7 +4457,7 @@
         </p:nvSpPr>
         <p:spPr>
           <a:xfrm>
-            <a:off x="2148840" y="3520440"/>
+            <a:off x="2148840" y="3657600"/>
             <a:ext cx="1371600" cy="731520"/>
           </a:xfrm>
           <a:prstGeom prst="roundRect">
@@ -4479,7 +4479,7 @@
         </p:nvSpPr>
         <p:spPr>
           <a:xfrm>
-            <a:off x="2148840" y="3520440"/>
+            <a:off x="2148840" y="3657600"/>
             <a:ext cx="1371600" cy="731520"/>
           </a:xfrm>
           <a:prstGeom prst="rect">
@@ -4535,7 +4535,7 @@
         </p:nvSpPr>
         <p:spPr>
           <a:xfrm>
-            <a:off x="2148840" y="4434840"/>
+            <a:off x="2148840" y="4663440"/>
             <a:ext cx="1371600" cy="731520"/>
           </a:xfrm>
           <a:prstGeom prst="roundRect">
@@ -4557,7 +4557,7 @@
         </p:nvSpPr>
         <p:spPr>
           <a:xfrm>
-            <a:off x="2148840" y="4434840"/>
+            <a:off x="2148840" y="4663440"/>
             <a:ext cx="1371600" cy="731520"/>
           </a:xfrm>
           <a:prstGeom prst="rect">
@@ -4613,7 +4613,7 @@
         </p:nvSpPr>
         <p:spPr>
           <a:xfrm>
-            <a:off x="3886200" y="3977640"/>
+            <a:off x="3886200" y="4160520"/>
             <a:ext cx="1371600" cy="731520"/>
           </a:xfrm>
           <a:prstGeom prst="roundRect">
@@ -4635,7 +4635,7 @@
         </p:nvSpPr>
         <p:spPr>
           <a:xfrm>
-            <a:off x="3886200" y="3977640"/>
+            <a:off x="3886200" y="4160520"/>
             <a:ext cx="1371600" cy="731520"/>
           </a:xfrm>
           <a:prstGeom prst="rect">
@@ -4691,7 +4691,7 @@
         </p:nvSpPr>
         <p:spPr>
           <a:xfrm>
-            <a:off x="5623560" y="3977640"/>
+            <a:off x="5623560" y="4160520"/>
             <a:ext cx="1463040" cy="731520"/>
           </a:xfrm>
           <a:prstGeom prst="roundRect">
@@ -4713,7 +4713,7 @@
         </p:nvSpPr>
         <p:spPr>
           <a:xfrm>
-            <a:off x="5623560" y="3977640"/>
+            <a:off x="5623560" y="4160520"/>
             <a:ext cx="1463040" cy="731520"/>
           </a:xfrm>
           <a:prstGeom prst="rect">
@@ -4769,7 +4769,7 @@
         </p:nvSpPr>
         <p:spPr>
           <a:xfrm>
-            <a:off x="548640" y="4846320"/>
+            <a:off x="548640" y="5303520"/>
             <a:ext cx="7315200" cy="365760"/>
           </a:xfrm>
           <a:prstGeom prst="rect">
